--- a/CalendarFly_Pitch_Deck (1).pptx
+++ b/CalendarFly_Pitch_Deck (1).pptx
@@ -1635,7 +1635,29 @@
                 <a:ea typeface="Cambria" pitchFamily="34" charset="-122"/>
                 <a:cs typeface="Cambria" pitchFamily="34" charset="-120"/>
               </a:rPr>
-              <a:t>Temples still run on spreadsheets and screenshots.</a:t>
+              <a:t>Non Profit Orgs like Temples, </a:t>
+            </a:r>
+            <a:r>
+              <a:rPr lang="en-US" sz="3000" b="1" dirty="0" err="1">
+                <a:solidFill>
+                  <a:srgbClr val="FFFFFF"/>
+                </a:solidFill>
+                <a:latin typeface="Cambria" pitchFamily="34" charset="0"/>
+                <a:ea typeface="Cambria" pitchFamily="34" charset="-122"/>
+                <a:cs typeface="Cambria" pitchFamily="34" charset="-120"/>
+              </a:rPr>
+              <a:t>Kootas</a:t>
+            </a:r>
+            <a:r>
+              <a:rPr lang="en-US" sz="3000" b="1" dirty="0">
+                <a:solidFill>
+                  <a:srgbClr val="FFFFFF"/>
+                </a:solidFill>
+                <a:latin typeface="Cambria" pitchFamily="34" charset="0"/>
+                <a:ea typeface="Cambria" pitchFamily="34" charset="-122"/>
+                <a:cs typeface="Cambria" pitchFamily="34" charset="-120"/>
+              </a:rPr>
+              <a:t>, Community Events still run on spreadsheets and screenshots.</a:t>
             </a:r>
             <a:endParaRPr lang="en-US" sz="3000" dirty="0"/>
           </a:p>
@@ -7154,7 +7176,7 @@
                 <a:ea typeface="Calibri" pitchFamily="34" charset="-122"/>
                 <a:cs typeface="Calibri" pitchFamily="34" charset="-120"/>
               </a:rPr>
-              <a:t>Live at a real temple</a:t>
+              <a:t>Live at a community event</a:t>
             </a:r>
             <a:endParaRPr lang="en-US" sz="1400" dirty="0"/>
           </a:p>
